--- a/analysis/percentage-atypical/presentation/presentation.pptx
+++ b/analysis/percentage-atypical/presentation/presentation.pptx
@@ -3515,12 +3515,40 @@
               <a:rPr lang="fr-FR" dirty="0"/>
               <a:t> of </a:t>
             </a:r>
+            <a:r>
+              <a:rPr lang="fr-FR" dirty="0" err="1"/>
+              <a:t>what</a:t>
+            </a:r>
+            <a:r>
+              <a:rPr lang="fr-FR" dirty="0"/>
+              <a:t> </a:t>
+            </a:r>
+            <a:r>
+              <a:rPr lang="fr-FR" dirty="0" err="1"/>
+              <a:t>happens</a:t>
+            </a:r>
+            <a:r>
+              <a:rPr lang="fr-FR" dirty="0"/>
+              <a:t> </a:t>
+            </a:r>
+            <a:r>
+              <a:rPr lang="fr-FR" dirty="0" err="1"/>
+              <a:t>when</a:t>
+            </a:r>
+            <a:r>
+              <a:rPr lang="fr-FR" dirty="0"/>
+              <a:t> </a:t>
+            </a:r>
             <a:br>
               <a:rPr lang="fr-FR" dirty="0"/>
             </a:br>
             <a:r>
+              <a:rPr lang="fr-FR" dirty="0"/>
+              <a:t>the entrance exam to </a:t>
+            </a:r>
+            <a:r>
               <a:rPr lang="fr-FR" dirty="0" err="1"/>
-              <a:t>what</a:t>
+              <a:t>univeristy</a:t>
             </a:r>
             <a:r>
               <a:rPr lang="fr-FR" dirty="0"/>
@@ -3528,54 +3556,7 @@
             </a:r>
             <a:r>
               <a:rPr lang="fr-FR" dirty="0" err="1"/>
-              <a:t>happens</a:t>
-            </a:r>
-            <a:r>
-              <a:rPr lang="fr-FR" dirty="0"/>
-              <a:t> </a:t>
-            </a:r>
-            <a:r>
-              <a:rPr lang="fr-FR" dirty="0" err="1"/>
-              <a:t>when</a:t>
-            </a:r>
-            <a:r>
-              <a:rPr lang="fr-FR" dirty="0"/>
-              <a:t> </a:t>
-            </a:r>
-            <a:r>
-              <a:rPr lang="fr-FR" dirty="0" err="1"/>
-              <a:t>you</a:t>
-            </a:r>
-            <a:r>
-              <a:rPr lang="fr-FR" dirty="0"/>
-              <a:t> </a:t>
-            </a:r>
-            <a:r>
-              <a:rPr lang="fr-FR" dirty="0" err="1"/>
-              <a:t>make</a:t>
-            </a:r>
-            <a:r>
-              <a:rPr lang="fr-FR" dirty="0"/>
-              <a:t> the entrance exam</a:t>
-            </a:r>
-            <a:br>
-              <a:rPr lang="fr-FR" dirty="0"/>
-            </a:br>
-            <a:r>
-              <a:rPr lang="fr-FR" dirty="0"/>
-              <a:t>to a </a:t>
-            </a:r>
-            <a:r>
-              <a:rPr lang="fr-FR" dirty="0" err="1"/>
-              <a:t>prestigious</a:t>
-            </a:r>
-            <a:r>
-              <a:rPr lang="fr-FR" dirty="0"/>
-              <a:t> </a:t>
-            </a:r>
-            <a:r>
-              <a:rPr lang="fr-FR" dirty="0" err="1"/>
-              <a:t>university</a:t>
+              <a:t>is</a:t>
             </a:r>
             <a:r>
               <a:rPr lang="fr-FR" dirty="0"/>
@@ -3762,7 +3743,7 @@
         </p:spPr>
         <p:txBody>
           <a:bodyPr>
-            <a:normAutofit fontScale="92500" lnSpcReduction="10000"/>
+            <a:normAutofit fontScale="92500" lnSpcReduction="20000"/>
           </a:bodyPr>
           <a:lstStyle/>
           <a:p>
@@ -4653,19 +4634,19 @@
             </a:r>
             <a:r>
               <a:rPr lang="fr-FR" sz="2300" dirty="0"/>
-              <a:t>. Imagine </a:t>
+              <a:t>. Is </a:t>
             </a:r>
             <a:r>
               <a:rPr lang="fr-FR" sz="2300" dirty="0" err="1"/>
-              <a:t>choosing</a:t>
+              <a:t>this</a:t>
             </a:r>
             <a:r>
               <a:rPr lang="fr-FR" sz="2300" dirty="0"/>
-              <a:t> a society </a:t>
+              <a:t> the society </a:t>
             </a:r>
             <a:r>
               <a:rPr lang="fr-FR" sz="2300" dirty="0" err="1"/>
-              <a:t>filled</a:t>
+              <a:t>you</a:t>
             </a:r>
             <a:r>
               <a:rPr lang="fr-FR" sz="2300" dirty="0"/>
@@ -4673,43 +4654,11 @@
             </a:r>
             <a:r>
               <a:rPr lang="fr-FR" sz="2300" dirty="0" err="1"/>
-              <a:t>with</a:t>
+              <a:t>want</a:t>
             </a:r>
             <a:r>
               <a:rPr lang="fr-FR" sz="2300" dirty="0"/>
-              <a:t> </a:t>
-            </a:r>
-            <a:r>
-              <a:rPr lang="fr-FR" sz="2300" dirty="0" err="1"/>
-              <a:t>liars</a:t>
-            </a:r>
-            <a:r>
-              <a:rPr lang="fr-FR" sz="2300" dirty="0"/>
-              <a:t> for a 1 in 1 million chance of </a:t>
-            </a:r>
-            <a:r>
-              <a:rPr lang="fr-FR" sz="2300" dirty="0" err="1"/>
-              <a:t>becoming</a:t>
-            </a:r>
-            <a:r>
-              <a:rPr lang="fr-FR" sz="2300" dirty="0"/>
-              <a:t> </a:t>
-            </a:r>
-            <a:r>
-              <a:rPr lang="fr-FR" sz="2300" dirty="0" err="1"/>
-              <a:t>slightly</a:t>
-            </a:r>
-            <a:r>
-              <a:rPr lang="fr-FR" sz="2300" dirty="0"/>
-              <a:t> </a:t>
-            </a:r>
-            <a:r>
-              <a:rPr lang="fr-FR" sz="2300" dirty="0" err="1"/>
-              <a:t>richer</a:t>
-            </a:r>
-            <a:r>
-              <a:rPr lang="fr-FR" sz="2300" dirty="0"/>
-              <a:t>? Do </a:t>
+              <a:t> to live in? Do </a:t>
             </a:r>
             <a:r>
               <a:rPr lang="fr-FR" sz="2300" dirty="0" err="1"/>
@@ -4758,6 +4707,88 @@
             <a:r>
               <a:rPr lang="fr-FR" sz="2300" dirty="0"/>
               <a:t>?</a:t>
+            </a:r>
+          </a:p>
+          <a:p>
+            <a:pPr marL="914400" lvl="1" indent="-457200">
+              <a:buFont typeface="+mj-lt"/>
+              <a:buAutoNum type="arabicPeriod"/>
+            </a:pPr>
+            <a:r>
+              <a:rPr lang="fr-FR" sz="2300" dirty="0"/>
+              <a:t>If </a:t>
+            </a:r>
+            <a:r>
+              <a:rPr lang="fr-FR" sz="2300" dirty="0" err="1"/>
+              <a:t>this</a:t>
+            </a:r>
+            <a:r>
+              <a:rPr lang="fr-FR" sz="2300" dirty="0"/>
+              <a:t> </a:t>
+            </a:r>
+            <a:r>
+              <a:rPr lang="fr-FR" sz="2300" dirty="0" err="1"/>
+              <a:t>is</a:t>
+            </a:r>
+            <a:r>
+              <a:rPr lang="fr-FR" sz="2300" dirty="0"/>
+              <a:t> the </a:t>
+            </a:r>
+            <a:r>
+              <a:rPr lang="fr-FR" sz="2300" dirty="0" err="1"/>
+              <a:t>next</a:t>
+            </a:r>
+            <a:r>
+              <a:rPr lang="fr-FR" sz="2300" dirty="0"/>
+              <a:t> </a:t>
+            </a:r>
+            <a:r>
+              <a:rPr lang="fr-FR" sz="2300" dirty="0" err="1"/>
+              <a:t>generation</a:t>
+            </a:r>
+            <a:r>
+              <a:rPr lang="fr-FR" sz="2300" dirty="0"/>
+              <a:t> of </a:t>
+            </a:r>
+            <a:r>
+              <a:rPr lang="fr-FR" sz="2300" dirty="0" err="1"/>
+              <a:t>doctors</a:t>
+            </a:r>
+            <a:r>
+              <a:rPr lang="fr-FR" sz="2300" dirty="0"/>
+              <a:t> and surgeons, </a:t>
+            </a:r>
+            <a:r>
+              <a:rPr lang="fr-FR" sz="2300" dirty="0" err="1"/>
+              <a:t>better</a:t>
+            </a:r>
+            <a:r>
+              <a:rPr lang="fr-FR" sz="2300" dirty="0"/>
+              <a:t> start </a:t>
+            </a:r>
+            <a:r>
+              <a:rPr lang="fr-FR" sz="2300" dirty="0" err="1"/>
+              <a:t>eating</a:t>
+            </a:r>
+            <a:r>
+              <a:rPr lang="fr-FR" sz="2300" dirty="0"/>
+              <a:t> </a:t>
+            </a:r>
+            <a:r>
+              <a:rPr lang="fr-FR" sz="2300" dirty="0" err="1"/>
+              <a:t>healthy</a:t>
+            </a:r>
+            <a:r>
+              <a:rPr lang="fr-FR" sz="2300" dirty="0"/>
+              <a:t> and </a:t>
+            </a:r>
+            <a:r>
+              <a:rPr lang="fr-FR" sz="2300" dirty="0" err="1"/>
+              <a:t>exercise</a:t>
+            </a:r>
+            <a:r>
+              <a:rPr lang="fr-FR" sz="2300" dirty="0"/>
+              <a:t>…</a:t>
             </a:r>
           </a:p>
         </p:txBody>
@@ -4784,9 +4815,22 @@
           <a:lstStyle/>
           <a:p>
             <a:r>
-              <a:rPr lang="fr-FR"/>
-              <a:t>Credit: @an0wen ; Source: https://github.com/an0wen/ResultadosUNAM</a:t>
-            </a:r>
+              <a:rPr lang="fr-FR" dirty="0"/>
+              <a:t>Credit: @an0wen ; Source: https://</a:t>
+            </a:r>
+            <a:r>
+              <a:rPr lang="fr-FR" dirty="0" err="1"/>
+              <a:t>github.com</a:t>
+            </a:r>
+            <a:r>
+              <a:rPr lang="fr-FR" dirty="0"/>
+              <a:t>/an0wen/</a:t>
+            </a:r>
+            <a:r>
+              <a:rPr lang="fr-FR" dirty="0" err="1"/>
+              <a:t>ResultadosUNAM</a:t>
+            </a:r>
+            <a:endParaRPr lang="fr-FR" dirty="0"/>
           </a:p>
         </p:txBody>
       </p:sp>
@@ -4874,7 +4918,7 @@
         </p:spPr>
         <p:txBody>
           <a:bodyPr>
-            <a:normAutofit/>
+            <a:normAutofit fontScale="92500"/>
           </a:bodyPr>
           <a:lstStyle/>
           <a:p>
@@ -4907,15 +4951,66 @@
             </a:r>
             <a:r>
               <a:rPr lang="fr-FR" dirty="0"/>
-              <a:t>) at </a:t>
-            </a:r>
+              <a:t>) at</a:t>
+            </a:r>
+            <a:br>
+              <a:rPr lang="fr-FR" dirty="0"/>
+            </a:br>
             <a:r>
               <a:rPr lang="fr-FR" b="1" dirty="0">
                 <a:solidFill>
                   <a:srgbClr val="C00000"/>
                 </a:solidFill>
               </a:rPr>
-              <a:t>UNAM</a:t>
+              <a:t>UNAM (</a:t>
+            </a:r>
+            <a:r>
+              <a:rPr lang="fr-FR" b="1" dirty="0" err="1">
+                <a:solidFill>
+                  <a:srgbClr val="C00000"/>
+                </a:solidFill>
+              </a:rPr>
+              <a:t>Universidad</a:t>
+            </a:r>
+            <a:r>
+              <a:rPr lang="fr-FR" b="1" dirty="0">
+                <a:solidFill>
+                  <a:srgbClr val="C00000"/>
+                </a:solidFill>
+              </a:rPr>
+              <a:t> </a:t>
+            </a:r>
+            <a:r>
+              <a:rPr lang="fr-FR" b="1" dirty="0" err="1">
+                <a:solidFill>
+                  <a:srgbClr val="C00000"/>
+                </a:solidFill>
+              </a:rPr>
+              <a:t>Nacional</a:t>
+            </a:r>
+            <a:r>
+              <a:rPr lang="fr-FR" b="1" dirty="0">
+                <a:solidFill>
+                  <a:srgbClr val="C00000"/>
+                </a:solidFill>
+              </a:rPr>
+              <a:t> </a:t>
+            </a:r>
+            <a:r>
+              <a:rPr lang="fr-FR" b="1" dirty="0" err="1">
+                <a:solidFill>
+                  <a:srgbClr val="C00000"/>
+                </a:solidFill>
+              </a:rPr>
+              <a:t>Autónoma</a:t>
+            </a:r>
+            <a:r>
+              <a:rPr lang="fr-FR" b="1" dirty="0">
+                <a:solidFill>
+                  <a:srgbClr val="C00000"/>
+                </a:solidFill>
+              </a:rPr>
+              <a:t> de México) </a:t>
             </a:r>
           </a:p>
           <a:p>
@@ -5883,6 +5978,85 @@
           </a:p>
         </p:txBody>
       </p:sp>
+      <p:sp>
+        <p:nvSpPr>
+          <p:cNvPr id="13" name="ZoneTexte 12">
+            <a:extLst>
+              <a:ext uri="{FF2B5EF4-FFF2-40B4-BE49-F238E27FC236}">
+                <a16:creationId xmlns:a16="http://schemas.microsoft.com/office/drawing/2014/main" id="{E67F7773-D56E-13A0-DFB5-6E701918070C}"/>
+              </a:ext>
+            </a:extLst>
+          </p:cNvPr>
+          <p:cNvSpPr txBox="1"/>
+          <p:nvPr/>
+        </p:nvSpPr>
+        <p:spPr>
+          <a:xfrm>
+            <a:off x="8104909" y="3941602"/>
+            <a:ext cx="1039091" cy="830997"/>
+          </a:xfrm>
+          <a:prstGeom prst="rect">
+            <a:avLst/>
+          </a:prstGeom>
+          <a:noFill/>
+        </p:spPr>
+        <p:txBody>
+          <a:bodyPr wrap="square" rtlCol="0">
+            <a:spAutoFit/>
+          </a:bodyPr>
+          <a:lstStyle/>
+          <a:p>
+            <a:r>
+              <a:rPr lang="fr-FR" sz="1200" dirty="0" err="1">
+                <a:solidFill>
+                  <a:srgbClr val="FF0000"/>
+                </a:solidFill>
+              </a:rPr>
+              <a:t>Wunderkind</a:t>
+            </a:r>
+            <a:r>
+              <a:rPr lang="fr-FR" sz="1200" dirty="0">
+                <a:solidFill>
+                  <a:srgbClr val="FF0000"/>
+                </a:solidFill>
+              </a:rPr>
+              <a:t> </a:t>
+            </a:r>
+            <a:r>
+              <a:rPr lang="fr-FR" sz="1200" dirty="0" err="1">
+                <a:solidFill>
+                  <a:srgbClr val="FF0000"/>
+                </a:solidFill>
+              </a:rPr>
+              <a:t>genius</a:t>
+            </a:r>
+            <a:r>
+              <a:rPr lang="fr-FR" sz="1200" dirty="0">
+                <a:solidFill>
+                  <a:srgbClr val="FF0000"/>
+                </a:solidFill>
+              </a:rPr>
+              <a:t> </a:t>
+            </a:r>
+            <a:r>
+              <a:rPr lang="fr-FR" sz="1200" dirty="0" err="1">
+                <a:solidFill>
+                  <a:srgbClr val="FF0000"/>
+                </a:solidFill>
+              </a:rPr>
+              <a:t>teenage</a:t>
+            </a:r>
+            <a:r>
+              <a:rPr lang="fr-FR" sz="1200" dirty="0">
+                <a:solidFill>
+                  <a:srgbClr val="FF0000"/>
+                </a:solidFill>
+              </a:rPr>
+              <a:t> surgeons</a:t>
+            </a:r>
+          </a:p>
+        </p:txBody>
+      </p:sp>
     </p:spTree>
     <p:extLst>
       <p:ext uri="{BB962C8B-B14F-4D97-AF65-F5344CB8AC3E}">
@@ -6039,20 +6213,12 @@
           <a:lstStyle/>
           <a:p>
             <a:r>
-              <a:rPr lang="fr-FR" sz="2800" u="sng" dirty="0">
+              <a:rPr lang="fr-FR" sz="2800" dirty="0">
                 <a:solidFill>
                   <a:srgbClr val="0070C0"/>
                 </a:solidFill>
               </a:rPr>
-              <a:t>2 populations model</a:t>
-            </a:r>
-            <a:r>
-              <a:rPr lang="fr-FR" sz="2800" dirty="0">
-                <a:solidFill>
-                  <a:srgbClr val="0070C0"/>
-                </a:solidFill>
-              </a:rPr>
-              <a:t>:</a:t>
+              <a:t>2 populations model:</a:t>
             </a:r>
           </a:p>
         </p:txBody>
@@ -6148,23 +6314,39 @@
           <a:lstStyle/>
           <a:p>
             <a:r>
+              <a:rPr lang="fr-FR" sz="2800" b="1" u="sng" dirty="0">
+                <a:solidFill>
+                  <a:srgbClr val="0070C0"/>
+                </a:solidFill>
+              </a:rPr>
+              <a:t>normal</a:t>
+            </a:r>
+            <a:r>
               <a:rPr lang="fr-FR" sz="2800" dirty="0">
                 <a:solidFill>
                   <a:srgbClr val="0070C0"/>
                 </a:solidFill>
               </a:rPr>
-              <a:t>normal and « </a:t>
-            </a:r>
-            <a:r>
-              <a:rPr lang="fr-FR" sz="2800" dirty="0" err="1">
+              <a:t> and </a:t>
+            </a:r>
+            <a:r>
+              <a:rPr lang="fr-FR" sz="2800" b="1" u="sng" dirty="0">
                 <a:solidFill>
                   <a:srgbClr val="0070C0"/>
                 </a:solidFill>
               </a:rPr>
+              <a:t>« </a:t>
+            </a:r>
+            <a:r>
+              <a:rPr lang="fr-FR" sz="2800" b="1" u="sng" dirty="0" err="1">
+                <a:solidFill>
+                  <a:srgbClr val="0070C0"/>
+                </a:solidFill>
+              </a:rPr>
               <a:t>boosted</a:t>
             </a:r>
             <a:r>
-              <a:rPr lang="fr-FR" sz="2800" dirty="0">
+              <a:rPr lang="fr-FR" sz="2800" b="1" u="sng" dirty="0">
                 <a:solidFill>
                   <a:srgbClr val="0070C0"/>
                 </a:solidFill>
@@ -7790,7 +7972,7 @@
           <a:p>
             <a:r>
               <a:rPr lang="fr-FR" dirty="0"/>
-              <a:t>Disclaimer(s)</a:t>
+              <a:t>Disclaimer</a:t>
             </a:r>
           </a:p>
         </p:txBody>
@@ -7813,7 +7995,9 @@
         </p:nvSpPr>
         <p:spPr/>
         <p:txBody>
-          <a:bodyPr/>
+          <a:bodyPr>
+            <a:normAutofit lnSpcReduction="10000"/>
+          </a:bodyPr>
           <a:lstStyle/>
           <a:p>
             <a:r>
@@ -7867,6 +8051,36 @@
             <a:r>
               <a:rPr lang="fr-FR" dirty="0"/>
               <a:t> performance.</a:t>
+            </a:r>
+          </a:p>
+          <a:p>
+            <a:r>
+              <a:rPr lang="fr-FR" dirty="0"/>
+              <a:t>This </a:t>
+            </a:r>
+            <a:r>
+              <a:rPr lang="fr-FR" dirty="0" err="1"/>
+              <a:t>is</a:t>
+            </a:r>
+            <a:r>
+              <a:rPr lang="fr-FR" dirty="0"/>
+              <a:t> a model, and a </a:t>
+            </a:r>
+            <a:r>
+              <a:rPr lang="fr-FR" dirty="0" err="1"/>
+              <a:t>very</a:t>
+            </a:r>
+            <a:r>
+              <a:rPr lang="fr-FR" dirty="0"/>
+              <a:t> </a:t>
+            </a:r>
+            <a:r>
+              <a:rPr lang="fr-FR" dirty="0" err="1"/>
+              <a:t>simplistic</a:t>
+            </a:r>
+            <a:r>
+              <a:rPr lang="fr-FR" dirty="0"/>
+              <a:t> one.</a:t>
             </a:r>
           </a:p>
           <a:p>
@@ -7961,20 +8175,6 @@
             </a:r>
             <a:r>
               <a:rPr lang="fr-FR" dirty="0" err="1"/>
-              <a:t>is</a:t>
-            </a:r>
-            <a:r>
-              <a:rPr lang="fr-FR" dirty="0"/>
-              <a:t> a model, and not a good one.</a:t>
-            </a:r>
-          </a:p>
-          <a:p>
-            <a:r>
-              <a:rPr lang="fr-FR" dirty="0"/>
-              <a:t>This </a:t>
-            </a:r>
-            <a:r>
-              <a:rPr lang="fr-FR" dirty="0" err="1"/>
               <a:t>only</a:t>
             </a:r>
             <a:r>
@@ -8029,6 +8229,68 @@
               <a:rPr lang="fr-FR" dirty="0"/>
               <a:t> performance.</a:t>
             </a:r>
+          </a:p>
+          <a:p>
+            <a:r>
+              <a:rPr lang="fr-FR" dirty="0"/>
+              <a:t>All code and </a:t>
+            </a:r>
+            <a:r>
+              <a:rPr lang="fr-FR" dirty="0" err="1"/>
+              <a:t>material</a:t>
+            </a:r>
+            <a:r>
+              <a:rPr lang="fr-FR" dirty="0"/>
+              <a:t> </a:t>
+            </a:r>
+            <a:r>
+              <a:rPr lang="fr-FR" dirty="0" err="1"/>
+              <a:t>is</a:t>
+            </a:r>
+            <a:r>
+              <a:rPr lang="fr-FR" dirty="0"/>
+              <a:t> open source:</a:t>
+            </a:r>
+            <a:br>
+              <a:rPr lang="fr-FR" dirty="0"/>
+            </a:br>
+            <a:r>
+              <a:rPr lang="fr-FR" sz="2400" dirty="0" err="1">
+                <a:solidFill>
+                  <a:srgbClr val="0070C0"/>
+                </a:solidFill>
+                <a:latin typeface="Consolas" panose="020B0609020204030204" pitchFamily="49" charset="0"/>
+                <a:cs typeface="Consolas" panose="020B0609020204030204" pitchFamily="49" charset="0"/>
+              </a:rPr>
+              <a:t>github.com</a:t>
+            </a:r>
+            <a:r>
+              <a:rPr lang="fr-FR" sz="2400" dirty="0">
+                <a:solidFill>
+                  <a:srgbClr val="0070C0"/>
+                </a:solidFill>
+                <a:latin typeface="Consolas" panose="020B0609020204030204" pitchFamily="49" charset="0"/>
+                <a:cs typeface="Consolas" panose="020B0609020204030204" pitchFamily="49" charset="0"/>
+              </a:rPr>
+              <a:t>/an0wen/</a:t>
+            </a:r>
+            <a:r>
+              <a:rPr lang="fr-FR" sz="2400" dirty="0" err="1">
+                <a:solidFill>
+                  <a:srgbClr val="0070C0"/>
+                </a:solidFill>
+                <a:latin typeface="Consolas" panose="020B0609020204030204" pitchFamily="49" charset="0"/>
+                <a:cs typeface="Consolas" panose="020B0609020204030204" pitchFamily="49" charset="0"/>
+              </a:rPr>
+              <a:t>ResultadosUNAM</a:t>
+            </a:r>
+            <a:endParaRPr lang="fr-FR" dirty="0">
+              <a:solidFill>
+                <a:srgbClr val="0070C0"/>
+              </a:solidFill>
+              <a:latin typeface="Consolas" panose="020B0609020204030204" pitchFamily="49" charset="0"/>
+              <a:cs typeface="Consolas" panose="020B0609020204030204" pitchFamily="49" charset="0"/>
+            </a:endParaRPr>
           </a:p>
         </p:txBody>
       </p:sp>
@@ -8054,9 +8316,22 @@
           <a:lstStyle/>
           <a:p>
             <a:r>
-              <a:rPr lang="fr-FR"/>
-              <a:t>Credit: @an0wen ; Source: https://github.com/an0wen/ResultadosUNAM</a:t>
-            </a:r>
+              <a:rPr lang="fr-FR" dirty="0"/>
+              <a:t>Credit: @an0wen ; Source: https://</a:t>
+            </a:r>
+            <a:r>
+              <a:rPr lang="fr-FR" dirty="0" err="1"/>
+              <a:t>github.com</a:t>
+            </a:r>
+            <a:r>
+              <a:rPr lang="fr-FR" dirty="0"/>
+              <a:t>/an0wen/</a:t>
+            </a:r>
+            <a:r>
+              <a:rPr lang="fr-FR" dirty="0" err="1"/>
+              <a:t>ResultadosUNAM</a:t>
+            </a:r>
+            <a:endParaRPr lang="fr-FR" dirty="0"/>
           </a:p>
         </p:txBody>
       </p:sp>
